--- a/practice/p1/practice 1.pptx
+++ b/practice/p1/practice 1.pptx
@@ -3669,7 +3669,7 @@
       </p:sp>
       <p:pic>
         <p:nvPicPr>
-          <p:cNvPr id="4" name="Picture 2" descr="C:\Users\1\Downloads\qr-code (3).png"/>
+          <p:cNvPr id="1026" name="Picture 2" descr="C:\Users\1\Downloads\qr-code (4).png"/>
           <p:cNvPicPr>
             <a:picLocks noChangeAspect="1" noChangeArrowheads="1"/>
           </p:cNvPicPr>
@@ -3690,8 +3690,8 @@
         </p:blipFill>
         <p:spPr bwMode="auto">
           <a:xfrm>
-            <a:off x="5824736" y="1203598"/>
-            <a:ext cx="2995736" cy="2995736"/>
+            <a:off x="5824737" y="965994"/>
+            <a:ext cx="3122540" cy="3122540"/>
           </a:xfrm>
           <a:prstGeom prst="rect">
             <a:avLst/>
